--- a/assets/pptx/catalog-28.pptx
+++ b/assets/pptx/catalog-28.pptx
@@ -3262,7 +3262,7 @@
                 <a:ea typeface="Ebrima"/>
                 <a:cs typeface="Ebrima"/>
               </a:rPr>
-              <a:t>አባ ወድሃለው (8X)</a:t>
+              <a:t>አባ ወድሃለው 8X</a:t>
             </a:r>
           </a:p>
           <a:p>
@@ -3401,7 +3401,7 @@
                 <a:ea typeface="Ebrima"/>
                 <a:cs typeface="Ebrima"/>
               </a:rPr>
-              <a:t>አባ ወድሃለው (8X)</a:t>
+              <a:t>አባ ወድሃለው 8X</a:t>
             </a:r>
           </a:p>
           <a:p>
@@ -3540,7 +3540,7 @@
                 <a:ea typeface="Ebrima"/>
                 <a:cs typeface="Ebrima"/>
               </a:rPr>
-              <a:t>ኦሆ ወድሃለው ወድሃለው አባ ወድሃለው (2X)</a:t>
+              <a:t>ኦሆ ወድሃለው ወድሃለው አባ ወድሃለው 2X</a:t>
             </a:r>
           </a:p>
         </p:txBody>
@@ -3607,7 +3607,7 @@
                 <a:ea typeface="Ebrima"/>
                 <a:cs typeface="Ebrima"/>
               </a:rPr>
-              <a:t>አባ ወድሃለው (6X)</a:t>
+              <a:t>አባ ወድሃለው 6X</a:t>
             </a:r>
           </a:p>
           <a:p>
@@ -3625,7 +3625,7 @@
                 <a:ea typeface="Ebrima"/>
                 <a:cs typeface="Ebrima"/>
               </a:rPr>
-              <a:t>አባ ወድሃለው (8X)</a:t>
+              <a:t>አባ ወድሃለው 8X</a:t>
             </a:r>
           </a:p>
         </p:txBody>
